--- a/scientific.pptx
+++ b/scientific.pptx
@@ -457,6 +457,55 @@
           <a:bodyPr/>
           <a:lstStyle/>
           <a:p>
+            <a:r>
+              <a:rPr lang="en-GB" b="0" i="0" dirty="0">
+                <a:solidFill>
+                  <a:srgbClr val="BCBEC4"/>
+                </a:solidFill>
+                <a:effectLst/>
+                <a:latin typeface="Helvetica" pitchFamily="2" charset="0"/>
+              </a:rPr>
+              <a:t>Let's look at Poland specifically. The chart shows the full 60-year journey."</a:t>
+            </a:r>
+            <a:br>
+              <a:rPr lang="en-GB" dirty="0"/>
+            </a:br>
+            <a:r>
+              <a:rPr lang="en-GB" b="0" i="0" dirty="0">
+                <a:solidFill>
+                  <a:srgbClr val="BCBEC4"/>
+                </a:solidFill>
+                <a:effectLst/>
+                <a:latin typeface="Helvetica" pitchFamily="2" charset="0"/>
+              </a:rPr>
+              <a:t>"In 1960, Poland had 15 more births per 1,000 people than deaths — a massive natural surplus. The chart is solid green above zero."</a:t>
+            </a:r>
+            <a:br>
+              <a:rPr lang="en-GB" dirty="0"/>
+            </a:br>
+            <a:r>
+              <a:rPr lang="en-GB" b="0" i="0" dirty="0">
+                <a:solidFill>
+                  <a:srgbClr val="BCBEC4"/>
+                </a:solidFill>
+                <a:effectLst/>
+                <a:latin typeface="Helvetica" pitchFamily="2" charset="0"/>
+              </a:rPr>
+              <a:t>"Then watch the slope. Through the 1980s and 90s, births fell. The country crossed zero around 2002. Now it's at -3.30 — natural decline."</a:t>
+            </a:r>
+            <a:br>
+              <a:rPr lang="en-GB" dirty="0"/>
+            </a:br>
+            <a:r>
+              <a:rPr lang="en-GB" b="0" i="0" dirty="0">
+                <a:solidFill>
+                  <a:srgbClr val="BCBEC4"/>
+                </a:solidFill>
+                <a:effectLst/>
+                <a:latin typeface="Helvetica" pitchFamily="2" charset="0"/>
+              </a:rPr>
+              <a:t>"The purple line is a 5-year moving average. It smooths out noise — COVID spikes, economic shocks — and shows the real underlying trend. And the trend has been downward for 40 years.</a:t>
+            </a:r>
             <a:endParaRPr lang="en-US" dirty="0"/>
           </a:p>
         </p:txBody>
@@ -541,6 +590,86 @@
           <a:bodyPr/>
           <a:lstStyle/>
           <a:p>
+            <a:r>
+              <a:rPr lang="en-GB" b="0" i="0" dirty="0">
+                <a:solidFill>
+                  <a:srgbClr val="BCBEC4"/>
+                </a:solidFill>
+                <a:effectLst/>
+                <a:latin typeface="Helvetica" pitchFamily="2" charset="0"/>
+              </a:rPr>
+              <a:t>Let's rewind 60 years. Watch the map."</a:t>
+            </a:r>
+            <a:br>
+              <a:rPr lang="en-GB" dirty="0"/>
+            </a:br>
+            <a:br>
+              <a:rPr lang="en-GB" dirty="0"/>
+            </a:br>
+            <a:r>
+              <a:rPr lang="en-GB" b="0" i="0" dirty="0">
+                <a:solidFill>
+                  <a:srgbClr val="BCBEC4"/>
+                </a:solidFill>
+                <a:effectLst/>
+                <a:latin typeface="Helvetica" pitchFamily="2" charset="0"/>
+              </a:rPr>
+              <a:t>"In 1960, natural growth was positive almost everywhere. Birth rates were high. The baby boom was real. Something changed — and this visualization lets us see exactly what, and where, and when.</a:t>
+            </a:r>
+          </a:p>
+          <a:p>
+            <a:endParaRPr lang="en-GB" b="0" i="0" dirty="0">
+              <a:solidFill>
+                <a:srgbClr val="BCBEC4"/>
+              </a:solidFill>
+              <a:effectLst/>
+              <a:latin typeface="Helvetica" pitchFamily="2" charset="0"/>
+            </a:endParaRPr>
+          </a:p>
+          <a:p>
+            <a:r>
+              <a:rPr lang="en-GB" b="0" i="0" dirty="0">
+                <a:solidFill>
+                  <a:srgbClr val="BCBEC4"/>
+                </a:solidFill>
+                <a:effectLst/>
+                <a:latin typeface="Helvetica" pitchFamily="2" charset="0"/>
+              </a:rPr>
+              <a:t>Poland is not alone. Here are its </a:t>
+            </a:r>
+            <a:r>
+              <a:rPr lang="en-GB" b="0" i="0" dirty="0" err="1">
+                <a:solidFill>
+                  <a:srgbClr val="BCBEC4"/>
+                </a:solidFill>
+                <a:effectLst/>
+                <a:latin typeface="Helvetica" pitchFamily="2" charset="0"/>
+              </a:rPr>
+              <a:t>neighbors</a:t>
+            </a:r>
+            <a:r>
+              <a:rPr lang="en-GB" b="0" i="0" dirty="0">
+                <a:solidFill>
+                  <a:srgbClr val="BCBEC4"/>
+                </a:solidFill>
+                <a:effectLst/>
+                <a:latin typeface="Helvetica" pitchFamily="2" charset="0"/>
+              </a:rPr>
+              <a:t> — Czechia, Slovakia, Hungary, Slovenia. All of them show the same red downward sparklines. This is a Central European demographic story, not a uniquely Polish one."</a:t>
+            </a:r>
+            <a:br>
+              <a:rPr lang="en-GB" dirty="0"/>
+            </a:br>
+            <a:r>
+              <a:rPr lang="en-GB" b="0" i="0" dirty="0">
+                <a:solidFill>
+                  <a:srgbClr val="BCBEC4"/>
+                </a:solidFill>
+                <a:effectLst/>
+                <a:latin typeface="Helvetica" pitchFamily="2" charset="0"/>
+              </a:rPr>
+              <a:t>"You can click any country in this list to switch your selection instantly."</a:t>
+            </a:r>
             <a:endParaRPr lang="en-US" dirty="0"/>
           </a:p>
         </p:txBody>
@@ -624,6 +753,264 @@
         <p:txBody>
           <a:bodyPr/>
           <a:lstStyle/>
+          <a:p>
+            <a:r>
+              <a:rPr lang="en-GB" b="0" i="0" dirty="0">
+                <a:solidFill>
+                  <a:srgbClr val="BCBEC4"/>
+                </a:solidFill>
+                <a:effectLst/>
+                <a:latin typeface="Helvetica" pitchFamily="2" charset="0"/>
+              </a:rPr>
+              <a:t>Why is natural growth declining? There are only two components: births and deaths."</a:t>
+            </a:r>
+            <a:br>
+              <a:rPr lang="en-GB" dirty="0"/>
+            </a:br>
+            <a:r>
+              <a:rPr lang="en-GB" b="0" i="1" dirty="0">
+                <a:solidFill>
+                  <a:srgbClr val="BCBEC4"/>
+                </a:solidFill>
+                <a:effectLst/>
+                <a:latin typeface="Helvetica" pitchFamily="2" charset="0"/>
+              </a:rPr>
+              <a:t>(switch to Crude Birth Rate)</a:t>
+            </a:r>
+            <a:br>
+              <a:rPr lang="en-GB" dirty="0"/>
+            </a:br>
+            <a:r>
+              <a:rPr lang="en-GB" b="0" i="0" dirty="0">
+                <a:solidFill>
+                  <a:srgbClr val="BCBEC4"/>
+                </a:solidFill>
+                <a:effectLst/>
+                <a:latin typeface="Helvetica" pitchFamily="2" charset="0"/>
+              </a:rPr>
+              <a:t>"Birth rate in Poland: from ~20 per 1,000 in 1960 to around 9 today. Cut in half."</a:t>
+            </a:r>
+            <a:br>
+              <a:rPr lang="en-GB" dirty="0"/>
+            </a:br>
+            <a:r>
+              <a:rPr lang="en-GB" b="0" i="1" dirty="0">
+                <a:solidFill>
+                  <a:srgbClr val="BCBEC4"/>
+                </a:solidFill>
+                <a:effectLst/>
+                <a:latin typeface="Helvetica" pitchFamily="2" charset="0"/>
+              </a:rPr>
+              <a:t>(switch to Crude Death Rate)</a:t>
+            </a:r>
+            <a:br>
+              <a:rPr lang="en-GB" dirty="0"/>
+            </a:br>
+            <a:r>
+              <a:rPr lang="en-GB" b="0" i="0" dirty="0">
+                <a:solidFill>
+                  <a:srgbClr val="BCBEC4"/>
+                </a:solidFill>
+                <a:effectLst/>
+                <a:latin typeface="Helvetica" pitchFamily="2" charset="0"/>
+              </a:rPr>
+              <a:t>"Death rate: relatively stable, around 10–11 per 1,000. Hasn't changed dramatically."</a:t>
+            </a:r>
+            <a:br>
+              <a:rPr lang="en-GB" dirty="0"/>
+            </a:br>
+            <a:r>
+              <a:rPr lang="en-GB" b="0" i="0" dirty="0">
+                <a:solidFill>
+                  <a:srgbClr val="BCBEC4"/>
+                </a:solidFill>
+                <a:effectLst/>
+                <a:latin typeface="Helvetica" pitchFamily="2" charset="0"/>
+              </a:rPr>
+              <a:t>"So the decline is driven almost entirely by collapsing birth rates, not rising mortality. That's the story.</a:t>
+            </a:r>
+          </a:p>
+          <a:p>
+            <a:endParaRPr lang="en-GB" b="0" i="0" dirty="0">
+              <a:solidFill>
+                <a:srgbClr val="BCBEC4"/>
+              </a:solidFill>
+              <a:effectLst/>
+              <a:latin typeface="Helvetica" pitchFamily="2" charset="0"/>
+            </a:endParaRPr>
+          </a:p>
+          <a:p>
+            <a:endParaRPr lang="en-GB" b="0" i="0" dirty="0">
+              <a:solidFill>
+                <a:srgbClr val="BCBEC4"/>
+              </a:solidFill>
+              <a:effectLst/>
+              <a:latin typeface="Helvetica" pitchFamily="2" charset="0"/>
+            </a:endParaRPr>
+          </a:p>
+          <a:p>
+            <a:pPr algn="l"/>
+            <a:r>
+              <a:rPr lang="en-GB" b="0" i="0" dirty="0">
+                <a:solidFill>
+                  <a:srgbClr val="BCBEC4"/>
+                </a:solidFill>
+                <a:effectLst/>
+                <a:latin typeface="Helvetica" pitchFamily="2" charset="0"/>
+              </a:rPr>
+              <a:t>This visualization was built to answer five specific questions about European demographics:"</a:t>
+            </a:r>
+          </a:p>
+          <a:p>
+            <a:pPr algn="l">
+              <a:buFont typeface="+mj-lt"/>
+              <a:buAutoNum type="arabicPeriod"/>
+            </a:pPr>
+            <a:r>
+              <a:rPr lang="en-GB" b="1" i="0" dirty="0">
+                <a:solidFill>
+                  <a:srgbClr val="BCBEC4"/>
+                </a:solidFill>
+                <a:effectLst/>
+                <a:latin typeface="Helvetica" pitchFamily="2" charset="0"/>
+              </a:rPr>
+              <a:t>WHERE</a:t>
+            </a:r>
+            <a:r>
+              <a:rPr lang="en-GB" b="0" i="0" dirty="0">
+                <a:solidFill>
+                  <a:srgbClr val="BCBEC4"/>
+                </a:solidFill>
+                <a:effectLst/>
+                <a:latin typeface="Helvetica" pitchFamily="2" charset="0"/>
+              </a:rPr>
+              <a:t> is natural decline happening? → the choropleth map</a:t>
+            </a:r>
+          </a:p>
+          <a:p>
+            <a:pPr algn="l">
+              <a:buFont typeface="+mj-lt"/>
+              <a:buAutoNum type="arabicPeriod"/>
+            </a:pPr>
+            <a:r>
+              <a:rPr lang="en-GB" b="1" i="0" dirty="0">
+                <a:solidFill>
+                  <a:srgbClr val="BCBEC4"/>
+                </a:solidFill>
+                <a:effectLst/>
+                <a:latin typeface="Helvetica" pitchFamily="2" charset="0"/>
+              </a:rPr>
+              <a:t>WHEN</a:t>
+            </a:r>
+            <a:r>
+              <a:rPr lang="en-GB" b="0" i="0" dirty="0">
+                <a:solidFill>
+                  <a:srgbClr val="BCBEC4"/>
+                </a:solidFill>
+                <a:effectLst/>
+                <a:latin typeface="Helvetica" pitchFamily="2" charset="0"/>
+              </a:rPr>
+              <a:t> did a country tip from growth to decline? → the zero-crossing in the area chart</a:t>
+            </a:r>
+          </a:p>
+          <a:p>
+            <a:pPr algn="l">
+              <a:buFont typeface="+mj-lt"/>
+              <a:buAutoNum type="arabicPeriod"/>
+            </a:pPr>
+            <a:r>
+              <a:rPr lang="en-GB" b="1" i="0" dirty="0">
+                <a:solidFill>
+                  <a:srgbClr val="BCBEC4"/>
+                </a:solidFill>
+                <a:effectLst/>
+                <a:latin typeface="Helvetica" pitchFamily="2" charset="0"/>
+              </a:rPr>
+              <a:t>HOW FAST</a:t>
+            </a:r>
+            <a:r>
+              <a:rPr lang="en-GB" b="0" i="0" dirty="0">
+                <a:solidFill>
+                  <a:srgbClr val="BCBEC4"/>
+                </a:solidFill>
+                <a:effectLst/>
+                <a:latin typeface="Helvetica" pitchFamily="2" charset="0"/>
+              </a:rPr>
+              <a:t> is the trend? → the slope of the moving average</a:t>
+            </a:r>
+          </a:p>
+          <a:p>
+            <a:pPr algn="l">
+              <a:buFont typeface="+mj-lt"/>
+              <a:buAutoNum type="arabicPeriod"/>
+            </a:pPr>
+            <a:r>
+              <a:rPr lang="en-GB" b="1" i="0" dirty="0">
+                <a:solidFill>
+                  <a:srgbClr val="BCBEC4"/>
+                </a:solidFill>
+                <a:effectLst/>
+                <a:latin typeface="Helvetica" pitchFamily="2" charset="0"/>
+              </a:rPr>
+              <a:t>WHAT IS DRIVING IT</a:t>
+            </a:r>
+            <a:r>
+              <a:rPr lang="en-GB" b="0" i="0" dirty="0">
+                <a:solidFill>
+                  <a:srgbClr val="BCBEC4"/>
+                </a:solidFill>
+                <a:effectLst/>
+                <a:latin typeface="Helvetica" pitchFamily="2" charset="0"/>
+              </a:rPr>
+              <a:t> — births or deaths? → switching indicators</a:t>
+            </a:r>
+          </a:p>
+          <a:p>
+            <a:pPr algn="l">
+              <a:buFont typeface="+mj-lt"/>
+              <a:buAutoNum type="arabicPeriod"/>
+            </a:pPr>
+            <a:r>
+              <a:rPr lang="en-GB" b="1" i="0" dirty="0">
+                <a:solidFill>
+                  <a:srgbClr val="BCBEC4"/>
+                </a:solidFill>
+                <a:effectLst/>
+                <a:latin typeface="Helvetica" pitchFamily="2" charset="0"/>
+              </a:rPr>
+              <a:t>HOW DOES MY COUNTRY COMPARE</a:t>
+            </a:r>
+            <a:r>
+              <a:rPr lang="en-GB" b="0" i="0" dirty="0">
+                <a:solidFill>
+                  <a:srgbClr val="BCBEC4"/>
+                </a:solidFill>
+                <a:effectLst/>
+                <a:latin typeface="Helvetica" pitchFamily="2" charset="0"/>
+              </a:rPr>
+              <a:t> to its </a:t>
+            </a:r>
+            <a:r>
+              <a:rPr lang="en-GB" b="0" i="0" dirty="0" err="1">
+                <a:solidFill>
+                  <a:srgbClr val="BCBEC4"/>
+                </a:solidFill>
+                <a:effectLst/>
+                <a:latin typeface="Helvetica" pitchFamily="2" charset="0"/>
+              </a:rPr>
+              <a:t>neighbors</a:t>
+            </a:r>
+            <a:r>
+              <a:rPr lang="en-GB" b="0" i="0" dirty="0">
+                <a:solidFill>
+                  <a:srgbClr val="BCBEC4"/>
+                </a:solidFill>
+                <a:effectLst/>
+                <a:latin typeface="Helvetica" pitchFamily="2" charset="0"/>
+              </a:rPr>
+              <a:t>? → the sparkline panel</a:t>
+            </a:r>
+          </a:p>
           <a:p>
             <a:endParaRPr lang="en-US" dirty="0"/>
           </a:p>
